--- a/assets/powerpoints/module-n2-panier/A3-ou-est-ce-produit.pptx
+++ b/assets/powerpoints/module-n2-panier/A3-ou-est-ce-produit.pptx
@@ -10222,7 +10222,43 @@
                 </a:solidFill>
                 <a:latin typeface="Verdana"/>
               </a:rPr>
-              <a:t>« Le savon est dans &lt;b&gt;l'allée 7&lt;/b&gt;. » On peut le trouver sans savoir lire les panneaux : les numéros sont écrits gros, en hauteur. Pour demander : « &lt;b&gt;C'est dans quelle allée ?&lt;/b&gt; »</a:t>
+              <a:t>« Le savon est dans </a:t>
+            </a:r>
+            <a:r>
+              <a:rPr sz="2000" b="1" i="0">
+                <a:solidFill>
+                  <a:srgbClr val="4B4F52"/>
+                </a:solidFill>
+                <a:latin typeface="Verdana"/>
+              </a:rPr>
+              <a:t>l'allée 7</a:t>
+            </a:r>
+            <a:r>
+              <a:rPr sz="2000" b="0" i="0">
+                <a:solidFill>
+                  <a:srgbClr val="4B4F52"/>
+                </a:solidFill>
+                <a:latin typeface="Verdana"/>
+              </a:rPr>
+              <a:t>. » On peut le trouver sans savoir lire les panneaux : les numéros sont écrits gros, en hauteur. Pour demander : « </a:t>
+            </a:r>
+            <a:r>
+              <a:rPr sz="2000" b="1" i="0">
+                <a:solidFill>
+                  <a:srgbClr val="4B4F52"/>
+                </a:solidFill>
+                <a:latin typeface="Verdana"/>
+              </a:rPr>
+              <a:t>C'est dans quelle allée ?</a:t>
+            </a:r>
+            <a:r>
+              <a:rPr sz="2000" b="0" i="0">
+                <a:solidFill>
+                  <a:srgbClr val="4B4F52"/>
+                </a:solidFill>
+                <a:latin typeface="Verdana"/>
+              </a:rPr>
+              <a:t> »</a:t>
             </a:r>
           </a:p>
         </p:txBody>
